--- a/output/SS_Generic_Clothing.pptx
+++ b/output/SS_Generic_Clothing.pptx
@@ -9841,7 +9841,7 @@
                           <a:cs typeface="Inter"/>
                           <a:sym typeface="Inter"/>
                         </a:rPr>
-                        <a:t>red, sleeveless, v-neck, medium dress under 4000</a:t>
+                        <a:t>red, sleeveless, v-neck, medium dress, within budget</a:t>
                       </a:r>
                       <a:endParaRPr sz="1000" u="none" cap="none" strike="noStrike">
                         <a:latin typeface="Inter"/>
@@ -13818,7 +13818,7 @@
                 <a:cs typeface="Inter"/>
                 <a:sym typeface="Inter"/>
               </a:rPr>
-              <a:t>What an AI Shopping Assistant changes :  “I need an outfit under 20000 for myself, size medium, for my sister’s beach wedding, I like sequins”</a:t>
+              <a:t>What an AI Shopping Assistant changes :  “I need an outfit for myself, size medium, for my sister’s beach wedding, I like sequins, within budget”</a:t>
             </a:r>
             <a:endParaRPr b="0" i="0" sz="1100" u="none" cap="none" strike="noStrike">
               <a:solidFill>
@@ -14707,7 +14707,7 @@
                 <a:cs typeface="Inter"/>
                 <a:sym typeface="Inter"/>
               </a:rPr>
-              <a:t>Unlike traditional search bars that only cater to keyword matching for direct queries like “red dress” or “16GM RAM”, AI chat assistants need to answer intent based queries like “I want an outfit for my birthday” or “I want a laptop good for Photoshop”. They have to map buyer intent to keywords using a knowledge graph and then search the catalog for relevant products using keywords, refer to the diagram in the next slide for an example</a:t>
+              <a:t>Unlike traditional search bars that only cater to keyword matching for direct queries like “red dress” or “16GM RAM”, AI chat assistants need to answer intent based queries like “I want an outfit for my birthday” or “I want a laptop good for Photoshop”. They have to map buyer intent to keywords using a knowledge graph and then search the catalog for relevant products using keywords, refer to the diagram on slide 11 for an example</a:t>
             </a:r>
             <a:endParaRPr b="0" i="0" sz="1200" u="none" cap="none" strike="noStrike">
               <a:solidFill>

--- a/output/SS_Generic_Clothing.pptx
+++ b/output/SS_Generic_Clothing.pptx
@@ -13985,16 +13985,17 @@
       </p:sp>
       <p:pic>
         <p:nvPicPr>
-          <p:cNvPr id="59" name="Google Shape;59;p4" title="Screenshot 2026-04-14 at 9.08.05 PM.png"/>
-          <p:cNvPicPr preferRelativeResize="0"/>
+          <p:cNvPr id="59" name="Picture 58" descr="clothing_table.png"/>
+          <p:cNvPicPr>
+            <a:picLocks noChangeAspect="1"/>
+          </p:cNvPicPr>
           <p:nvPr/>
         </p:nvPicPr>
-        <p:blipFill rotWithShape="1">
-          <a:blip r:embed="rId3">
-            <a:alphaModFix/>
-          </a:blip>
-          <a:srcRect b="0" l="0" r="0" t="0"/>
-          <a:stretch/>
+        <p:blipFill>
+          <a:blip r:embed="rId4"/>
+          <a:stretch>
+            <a:fillRect/>
+          </a:stretch>
         </p:blipFill>
         <p:spPr>
           <a:xfrm>
@@ -14004,10 +14005,6 @@
           <a:prstGeom prst="rect">
             <a:avLst/>
           </a:prstGeom>
-          <a:noFill/>
-          <a:ln>
-            <a:noFill/>
-          </a:ln>
         </p:spPr>
       </p:pic>
     </p:spTree>

--- a/output/SS_Generic_Clothing.pptx
+++ b/output/SS_Generic_Clothing.pptx
@@ -6213,7 +6213,7 @@
                 <a:cs typeface="Inter"/>
                 <a:sym typeface="Inter"/>
               </a:rPr>
-              <a:t>An AI shopping assistant doesn't just search — it sells</a:t>
+              <a:t>Your AI sales associate doesn't just search — it sells</a:t>
             </a:r>
             <a:endParaRPr b="0" i="0" sz="2300" u="none" cap="none" strike="noStrike">
               <a:solidFill>
@@ -6404,7 +6404,7 @@
                 <a:cs typeface="Inter"/>
                 <a:sym typeface="Inter"/>
               </a:rPr>
-              <a:t>Clarifies intent instead of dumping a catalog — asks the right follow-up questions (occasion, budget, use-case, size/fit) before suggesting anything.</a:t>
+              <a:t>Like your best sales associate, it clarifies intent instead of dumping a catalog — asks the right follow-up questions (occasion, budget, use-case, size/fit) before suggesting anything.</a:t>
             </a:r>
             <a:endParaRPr b="0" i="0" sz="1100" u="none" cap="none" strike="noStrike">
               <a:solidFill>
@@ -13818,7 +13818,7 @@
                 <a:cs typeface="Inter"/>
                 <a:sym typeface="Inter"/>
               </a:rPr>
-              <a:t>What an AI Shopping Assistant changes :  “I need an outfit for myself, size medium, for my sister’s beach wedding, I like sequins, within budget”</a:t>
+              <a:t>What an AI Sales Associate changes :  “I need an outfit for myself, size medium, for my sister’s beach wedding, I like sequins, within budget”</a:t>
             </a:r>
             <a:endParaRPr b="0" i="0" sz="1100" u="none" cap="none" strike="noStrike">
               <a:solidFill>
@@ -13858,7 +13858,7 @@
                 <a:cs typeface="Inter"/>
                 <a:sym typeface="Inter"/>
               </a:rPr>
-              <a:t>An AI shopping assistant powered by a knowledge graph understands intent + constraints + context, it maps beach to : pastels/boho, wedding to lehenga/sharara/gown, adds the conditions for sequins and returns relevant products from the catalog - exactly what the shopper means and wants, not just what they typed.</a:t>
+              <a:t>An AI sales associate powered by a knowledge graph understands intent + constraints + context, it maps beach to : pastels/boho, wedding to lehenga/sharara/gown, adds the conditions for sequins and returns relevant products from the catalog - exactly what the shopper means and wants, not just what they typed.</a:t>
             </a:r>
             <a:endParaRPr b="0" i="0" sz="1100" u="none" cap="none" strike="noStrike">
               <a:solidFill>
@@ -16036,7 +16036,7 @@
                 <a:cs typeface="Inter"/>
                 <a:sym typeface="Inter"/>
               </a:rPr>
-              <a:t>AI Shopping Assistant on Website that can understand user intent</a:t>
+              <a:t>AI Sales Associate on your website that guides buyers to the right purchase</a:t>
             </a:r>
             <a:endParaRPr b="0" i="0" sz="1600" u="none" cap="none" strike="noStrike">
               <a:solidFill>
@@ -16102,7 +16102,7 @@
                 <a:cs typeface="Inter"/>
                 <a:sym typeface="Inter"/>
               </a:rPr>
-              <a:t>Chat-based shopping: voice, image, and text input</a:t>
+              <a:t>Acts as a digital sales associate — asks the right questions, understands what the buyer actually needs, and guides them to the right product</a:t>
             </a:r>
             <a:endParaRPr b="0" i="0" sz="1300" u="none" cap="none" strike="noStrike">
               <a:solidFill>
@@ -16142,7 +16142,7 @@
                 <a:cs typeface="Inter"/>
                 <a:sym typeface="Inter"/>
               </a:rPr>
-              <a:t>Lower cost per query - Graph handles 90%+ of queries, LLM tokens only for edge cases</a:t>
+              <a:t>Drives revenue, not just answers — every conversation is a guided selling opportunity that converts browsers into buyers</a:t>
             </a:r>
             <a:endParaRPr b="0" i="0" sz="1300" u="none" cap="none" strike="noStrike">
               <a:solidFill>
@@ -16182,7 +16182,7 @@
                 <a:cs typeface="Inter"/>
                 <a:sym typeface="Inter"/>
               </a:rPr>
-              <a:t>All intent based queries such as “outfit for Ladakh trip”, “plan my meals” handled just like in ChatGPT and Amazon Rufus, giving buyer a full conversational experience.</a:t>
+              <a:t>All intent based queries such as “outfit for Ladakh trip”, “plan my meals” handled just like in ChatGPT and Amazon Rufus, guiding buyers to a purchase just like your best in-store sales associate would.</a:t>
             </a:r>
             <a:endParaRPr b="0" i="0" sz="1300" u="none" cap="none" strike="noStrike">
               <a:solidFill>

--- a/output/SS_Generic_Clothing.pptx
+++ b/output/SS_Generic_Clothing.pptx
@@ -4875,7 +4875,7 @@
                 <a:cs typeface="Inter"/>
                 <a:sym typeface="Inter"/>
               </a:rPr>
-              <a:t>Conversational AI shopping assistants for for e-commerce websites</a:t>
+              <a:t>Conversational AI shopping assistants for e-commerce websites</a:t>
             </a:r>
             <a:endParaRPr b="0" i="0" sz="1600" u="none" cap="none" strike="noStrike">
               <a:solidFill>
@@ -5371,7 +5371,7 @@
                 <a:cs typeface="Inter"/>
                 <a:sym typeface="Inter"/>
               </a:rPr>
-              <a:t>Virtual Try On</a:t>
+              <a:t>Virtual Try-On</a:t>
             </a:r>
             <a:endParaRPr b="0" i="0" sz="1600" u="none" cap="none" strike="noStrike">
               <a:solidFill>
@@ -5434,7 +5434,7 @@
                 <a:cs typeface="Inter"/>
                 <a:sym typeface="Inter"/>
               </a:rPr>
-              <a:t>Enable buyers to see how various sizes and styles look on them before buying reducing return rate.</a:t>
+              <a:t>Let shoppers visualize fit, drape, and styling across sizes — see how a kurta falls at their height, how a blazer sits on their shoulders, or how a lehenga’s flare looks in motion.</a:t>
             </a:r>
             <a:endParaRPr sz="1300">
               <a:solidFill>
@@ -5471,7 +5471,44 @@
                 <a:cs typeface="Inter"/>
                 <a:sym typeface="Inter"/>
               </a:rPr>
-              <a:t>Some companies have seen return rates go down by 40%.</a:t>
+              <a:t>Brands using virtual try-on have seen return rates drop by up to 40%.</a:t>
+            </a:r>
+            <a:endParaRPr sz="1300">
+              <a:solidFill>
+                <a:srgbClr val="4B5563"/>
+              </a:solidFill>
+              <a:latin typeface="Inter"/>
+              <a:ea typeface="Inter"/>
+              <a:cs typeface="Inter"/>
+              <a:sym typeface="Inter"/>
+            </a:endParaRPr>
+          </a:p>
+          <a:p>
+            <a:pPr indent="-342900" lvl="0" marL="342900" marR="0" rtl="0" algn="l">
+              <a:spcBef>
+                <a:spcPts val="0"/>
+              </a:spcBef>
+              <a:spcAft>
+                <a:spcPts val="0"/>
+              </a:spcAft>
+              <a:buClr>
+                <a:srgbClr val="4B5563"/>
+              </a:buClr>
+              <a:buSzPts val="1300"/>
+              <a:buFont typeface="Inter"/>
+              <a:buChar char="•"/>
+            </a:pPr>
+            <a:r>
+              <a:rPr lang="en-US" sz="1300">
+                <a:solidFill>
+                  <a:srgbClr val="4B5563"/>
+                </a:solidFill>
+                <a:latin typeface="Inter"/>
+                <a:ea typeface="Inter"/>
+                <a:cs typeface="Inter"/>
+                <a:sym typeface="Inter"/>
+              </a:rPr>
+              <a:t>Higher conversion, fewer returns, and the confidence to buy without visiting a store.</a:t>
             </a:r>
             <a:endParaRPr sz="1300">
               <a:solidFill>
@@ -5577,7 +5614,7 @@
                 <a:cs typeface="Inter"/>
                 <a:sym typeface="Inter"/>
               </a:rPr>
-              <a:t>Multilingual queries</a:t>
+              <a:t>Vernacular + natural-language queries</a:t>
             </a:r>
             <a:endParaRPr b="0" i="0" sz="1600" u="none" cap="none" strike="noStrike">
               <a:solidFill>
@@ -5640,7 +5677,7 @@
                 <a:cs typeface="Inter"/>
                 <a:sym typeface="Inter"/>
               </a:rPr>
-              <a:t>Enable buyers to use regional languages to search magnifying your customer base.</a:t>
+              <a:t>Hindi, Tamil, Telugu and Bengali queries mapped to the English catalog — “salwar suit” → salwar kameez, “dupatta” → stole, “pattu pudavai” → silk saree.</a:t>
             </a:r>
             <a:endParaRPr sz="1300">
               <a:solidFill>
@@ -5677,7 +5714,44 @@
                 <a:cs typeface="Inter"/>
                 <a:sym typeface="Inter"/>
               </a:rPr>
-              <a:t>Most regional brands get a huge quota of queries that use the local language and miss out.</a:t>
+              <a:t>Natural-language queries like “what should I wear to a sangeet if I’m plus-size” resolve to curated outfits instead of 0 results.</a:t>
+            </a:r>
+            <a:endParaRPr sz="1300">
+              <a:solidFill>
+                <a:srgbClr val="4B5563"/>
+              </a:solidFill>
+              <a:latin typeface="Inter"/>
+              <a:ea typeface="Inter"/>
+              <a:cs typeface="Inter"/>
+              <a:sym typeface="Inter"/>
+            </a:endParaRPr>
+          </a:p>
+          <a:p>
+            <a:pPr indent="-342900" lvl="0" marL="342900" marR="0" rtl="0" algn="l">
+              <a:spcBef>
+                <a:spcPts val="400"/>
+              </a:spcBef>
+              <a:spcAft>
+                <a:spcPts val="0"/>
+              </a:spcAft>
+              <a:buClr>
+                <a:srgbClr val="4B5563"/>
+              </a:buClr>
+              <a:buSzPts val="1300"/>
+              <a:buFont typeface="Inter"/>
+              <a:buChar char="•"/>
+            </a:pPr>
+            <a:r>
+              <a:rPr lang="en-US" sz="1300">
+                <a:solidFill>
+                  <a:srgbClr val="4B5563"/>
+                </a:solidFill>
+                <a:latin typeface="Inter"/>
+                <a:ea typeface="Inter"/>
+                <a:cs typeface="Inter"/>
+                <a:sym typeface="Inter"/>
+              </a:rPr>
+              <a:t>Unlocks tier-2 and tier-3 buyers for whom vernacular and conversational phrasing are the first language of search.</a:t>
             </a:r>
             <a:endParaRPr sz="1300">
               <a:solidFill>
@@ -5795,34 +5869,6 @@
               <a:sym typeface="Inter"/>
             </a:endParaRPr>
           </a:p>
-          <a:p>
-            <a:pPr indent="0" lvl="0" marL="0" marR="0" rtl="0" algn="l">
-              <a:spcBef>
-                <a:spcPts val="0"/>
-              </a:spcBef>
-              <a:spcAft>
-                <a:spcPts val="0"/>
-              </a:spcAft>
-              <a:buClr>
-                <a:srgbClr val="111827"/>
-              </a:buClr>
-              <a:buSzPts val="1600"/>
-              <a:buFont typeface="Inter"/>
-              <a:buNone/>
-            </a:pPr>
-            <a:r>
-              <a:t/>
-            </a:r>
-            <a:endParaRPr b="1" sz="1600">
-              <a:solidFill>
-                <a:srgbClr val="111827"/>
-              </a:solidFill>
-              <a:latin typeface="Inter"/>
-              <a:ea typeface="Inter"/>
-              <a:cs typeface="Inter"/>
-              <a:sym typeface="Inter"/>
-            </a:endParaRPr>
-          </a:p>
         </p:txBody>
       </p:sp>
       <p:sp>
@@ -5874,7 +5920,7 @@
                 <a:cs typeface="Inter"/>
                 <a:sym typeface="Inter"/>
               </a:rPr>
-              <a:t>40% of shoppers now start their buying journey on AI platforms.</a:t>
+              <a:t>40% of buyers now start their fashion research on ChatGPT / Gemini / Perplexity before visiting a brand site.</a:t>
             </a:r>
             <a:endParaRPr sz="1300">
               <a:solidFill>
@@ -5911,7 +5957,7 @@
                 <a:cs typeface="Inter"/>
                 <a:sym typeface="Inter"/>
               </a:rPr>
-              <a:t>Your brand’s AI-native storefront surfaces inside the AI conversation. Your brand’s recommendations appear with product imagery, descriptions, and lifestyle content.</a:t>
+              <a:t>Your catalog surfaces when shoppers ask “what should I wear to a Goa beach wedding” — alongside Myntra, ASOS, and Zalando.</a:t>
             </a:r>
             <a:endParaRPr sz="1300">
               <a:solidFill>
@@ -5948,7 +5994,7 @@
                 <a:cs typeface="Inter"/>
                 <a:sym typeface="Inter"/>
               </a:rPr>
-              <a:t>Works Across Every AI Platform. Not Just One.</a:t>
+              <a:t>H&amp;M, ASOS, Zalando and Klarna are already live on ChatGPT. Indian fashion retail is still wide open.</a:t>
             </a:r>
             <a:endParaRPr sz="1300">
               <a:solidFill>
@@ -10421,7 +10467,7 @@
                 <a:cs typeface="Inter"/>
                 <a:sym typeface="Inter"/>
               </a:rPr>
-              <a:t>We can run a full 500-query audit on your site in under a week and show you exactly where you are losing crores in revenue..</a:t>
+              <a:t>We can run a full 500-query audit on your site in under a week and show you exactly where you are losing crores in revenue.</a:t>
             </a:r>
             <a:endParaRPr b="0" i="0" sz="1500" u="none" cap="none" strike="noStrike">
               <a:solidFill>

--- a/output/SS_Generic_Clothing.pptx
+++ b/output/SS_Generic_Clothing.pptx
@@ -14750,7 +14750,7 @@
                 <a:cs typeface="Inter"/>
                 <a:sym typeface="Inter"/>
               </a:rPr>
-              <a:t>Unlike traditional search bars that only cater to keyword matching for direct queries like “red dress” or “16GM RAM”, AI chat assistants need to answer intent based queries like “I want an outfit for my birthday” or “I want a laptop good for Photoshop”. They have to map buyer intent to keywords using a knowledge graph and then search the catalog for relevant products using keywords, refer to the diagram on slide 11 for an example</a:t>
+              <a:t>Unlike traditional search bars that only cater to keyword matching for direct queries like “red dress” or “cotton kurta”, AI chat assistants need to answer intent based queries like “I want an outfit for my birthday” or “I want a saree gift for my mother-in-law’s birthday”. They have to map buyer intent to keywords using a knowledge graph and then search the catalog for relevant products using keywords, refer to the diagram on slide 11 for an example</a:t>
             </a:r>
             <a:endParaRPr b="0" i="0" sz="1200" u="none" cap="none" strike="noStrike">
               <a:solidFill>
@@ -16228,7 +16228,7 @@
                 <a:cs typeface="Inter"/>
                 <a:sym typeface="Inter"/>
               </a:rPr>
-              <a:t>All intent based queries such as “outfit for Ladakh trip”, “plan my meals” handled just like in ChatGPT and Amazon Rufus, guiding buyers to a purchase just like your best in-store sales associate would.</a:t>
+              <a:t>All intent based queries such as “outfit for Ladakh trip”, “what to wear to a sangeet” handled just like in ChatGPT and Amazon Rufus, guiding buyers to a purchase just like your best in-store sales associate would.</a:t>
             </a:r>
             <a:endParaRPr b="0" i="0" sz="1300" u="none" cap="none" strike="noStrike">
               <a:solidFill>
